--- a/docs/aau.cnap.lnp.cogniPain2.protocol.v1/StopSignalGameImages_DE.pptx
+++ b/docs/aau.cnap.lnp.cogniPain2.protocol.v1/StopSignalGameImages_DE.pptx
@@ -209,7 +209,7 @@
           <a:p>
             <a:fld id="{85D405C8-8E2E-43B7-A24E-734C11CAF91E}" type="datetimeFigureOut">
               <a:rPr lang="en-DK" smtClean="0"/>
-              <a:t>04/01/2025</a:t>
+              <a:t>26/06/2026</a:t>
             </a:fld>
             <a:endParaRPr lang="en-DK"/>
           </a:p>
@@ -368,7 +368,7 @@
           <a:p>
             <a:fld id="{18F6FCD6-91F5-47FE-A090-45B8ABDB6EF6}" type="slidenum">
               <a:rPr lang="en-DK" smtClean="0"/>
-              <a:t>‹nr.›</a:t>
+              <a:t>‹#›</a:t>
             </a:fld>
             <a:endParaRPr lang="en-DK"/>
           </a:p>
@@ -505,6 +505,13 @@
           </p:nvPr>
         </p:nvSpPr>
         <p:spPr/>
+        <p:txBody>
+          <a:bodyPr/>
+          <a:lstStyle/>
+          <a:p>
+            <a:endParaRPr lang="en-DK"/>
+          </a:p>
+        </p:txBody>
       </p:sp>
       <p:sp>
         <p:nvSpPr>
@@ -615,6 +622,13 @@
           </p:nvPr>
         </p:nvSpPr>
         <p:spPr/>
+        <p:txBody>
+          <a:bodyPr/>
+          <a:lstStyle/>
+          <a:p>
+            <a:endParaRPr lang="en-DK"/>
+          </a:p>
+        </p:txBody>
       </p:sp>
       <p:sp>
         <p:nvSpPr>
@@ -725,6 +739,13 @@
           </p:nvPr>
         </p:nvSpPr>
         <p:spPr/>
+        <p:txBody>
+          <a:bodyPr/>
+          <a:lstStyle/>
+          <a:p>
+            <a:endParaRPr lang="en-DK"/>
+          </a:p>
+        </p:txBody>
       </p:sp>
       <p:sp>
         <p:nvSpPr>
@@ -835,6 +856,13 @@
           </p:nvPr>
         </p:nvSpPr>
         <p:spPr/>
+        <p:txBody>
+          <a:bodyPr/>
+          <a:lstStyle/>
+          <a:p>
+            <a:endParaRPr lang="en-DK"/>
+          </a:p>
+        </p:txBody>
       </p:sp>
       <p:sp>
         <p:nvSpPr>
@@ -945,6 +973,13 @@
           </p:nvPr>
         </p:nvSpPr>
         <p:spPr/>
+        <p:txBody>
+          <a:bodyPr/>
+          <a:lstStyle/>
+          <a:p>
+            <a:endParaRPr lang="en-DK"/>
+          </a:p>
+        </p:txBody>
       </p:sp>
       <p:sp>
         <p:nvSpPr>
@@ -1055,6 +1090,13 @@
           </p:nvPr>
         </p:nvSpPr>
         <p:spPr/>
+        <p:txBody>
+          <a:bodyPr/>
+          <a:lstStyle/>
+          <a:p>
+            <a:endParaRPr lang="en-DK"/>
+          </a:p>
+        </p:txBody>
       </p:sp>
       <p:sp>
         <p:nvSpPr>
@@ -1165,6 +1207,13 @@
           </p:nvPr>
         </p:nvSpPr>
         <p:spPr/>
+        <p:txBody>
+          <a:bodyPr/>
+          <a:lstStyle/>
+          <a:p>
+            <a:endParaRPr lang="en-DK"/>
+          </a:p>
+        </p:txBody>
       </p:sp>
       <p:sp>
         <p:nvSpPr>
@@ -1710,13 +1759,13 @@
           <p:nvPr/>
         </p:nvPicPr>
         <p:blipFill>
-          <a:blip r:embed="rId3">
+          <a:blip>
             <a:extLst>
               <a:ext uri="{28A0092B-C50C-407E-A947-70E740481C1C}">
                 <a14:useLocalDpi xmlns:a14="http://schemas.microsoft.com/office/drawing/2010/main" val="0"/>
               </a:ext>
               <a:ext uri="{96DAC541-7B7A-43D3-8B79-37D633B846F1}">
-                <asvg:svgBlip xmlns:asvg="http://schemas.microsoft.com/office/drawing/2016/SVG/main" r:embed="rId4"/>
+                <asvg:svgBlip xmlns:asvg="http://schemas.microsoft.com/office/drawing/2016/SVG/main" r:embed="rId3"/>
               </a:ext>
             </a:extLst>
           </a:blip>
@@ -1779,13 +1828,13 @@
           <p:nvPr/>
         </p:nvPicPr>
         <p:blipFill>
-          <a:blip r:embed="rId3">
+          <a:blip>
             <a:extLst>
               <a:ext uri="{28A0092B-C50C-407E-A947-70E740481C1C}">
                 <a14:useLocalDpi xmlns:a14="http://schemas.microsoft.com/office/drawing/2010/main" val="0"/>
               </a:ext>
               <a:ext uri="{96DAC541-7B7A-43D3-8B79-37D633B846F1}">
-                <asvg:svgBlip xmlns:asvg="http://schemas.microsoft.com/office/drawing/2016/SVG/main" r:embed="rId4"/>
+                <asvg:svgBlip xmlns:asvg="http://schemas.microsoft.com/office/drawing/2016/SVG/main" r:embed="rId3"/>
               </a:ext>
             </a:extLst>
           </a:blip>
@@ -1897,13 +1946,13 @@
           <p:nvPr/>
         </p:nvPicPr>
         <p:blipFill>
-          <a:blip r:embed="rId3">
+          <a:blip>
             <a:extLst>
               <a:ext uri="{28A0092B-C50C-407E-A947-70E740481C1C}">
                 <a14:useLocalDpi xmlns:a14="http://schemas.microsoft.com/office/drawing/2010/main" val="0"/>
               </a:ext>
               <a:ext uri="{96DAC541-7B7A-43D3-8B79-37D633B846F1}">
-                <asvg:svgBlip xmlns:asvg="http://schemas.microsoft.com/office/drawing/2016/SVG/main" r:embed="rId4"/>
+                <asvg:svgBlip xmlns:asvg="http://schemas.microsoft.com/office/drawing/2016/SVG/main" r:embed="rId3"/>
               </a:ext>
             </a:extLst>
           </a:blip>
@@ -2015,13 +2064,13 @@
           <p:nvPr/>
         </p:nvPicPr>
         <p:blipFill>
-          <a:blip r:embed="rId3">
+          <a:blip>
             <a:extLst>
               <a:ext uri="{28A0092B-C50C-407E-A947-70E740481C1C}">
                 <a14:useLocalDpi xmlns:a14="http://schemas.microsoft.com/office/drawing/2010/main" val="0"/>
               </a:ext>
               <a:ext uri="{96DAC541-7B7A-43D3-8B79-37D633B846F1}">
-                <asvg:svgBlip xmlns:asvg="http://schemas.microsoft.com/office/drawing/2016/SVG/main" r:embed="rId4"/>
+                <asvg:svgBlip xmlns:asvg="http://schemas.microsoft.com/office/drawing/2016/SVG/main" r:embed="rId3"/>
               </a:ext>
             </a:extLst>
           </a:blip>
@@ -2114,13 +2163,13 @@
           <p:nvPr/>
         </p:nvPicPr>
         <p:blipFill>
-          <a:blip r:embed="rId3">
+          <a:blip>
             <a:extLst>
               <a:ext uri="{28A0092B-C50C-407E-A947-70E740481C1C}">
                 <a14:useLocalDpi xmlns:a14="http://schemas.microsoft.com/office/drawing/2010/main" val="0"/>
               </a:ext>
               <a:ext uri="{96DAC541-7B7A-43D3-8B79-37D633B846F1}">
-                <asvg:svgBlip xmlns:asvg="http://schemas.microsoft.com/office/drawing/2016/SVG/main" r:embed="rId4"/>
+                <asvg:svgBlip xmlns:asvg="http://schemas.microsoft.com/office/drawing/2016/SVG/main" r:embed="rId3"/>
               </a:ext>
             </a:extLst>
           </a:blip>
@@ -2182,8 +2231,8 @@
         </p:nvSpPr>
         <p:spPr>
           <a:xfrm>
-            <a:off x="537411" y="274108"/>
-            <a:ext cx="11117179" cy="6338851"/>
+            <a:off x="537411" y="62237"/>
+            <a:ext cx="11117179" cy="6795899"/>
           </a:xfrm>
           <a:prstGeom prst="rect">
             <a:avLst/>
@@ -2199,100 +2248,23 @@
             <a:pPr algn="ctr"/>
             <a:r>
               <a:rPr lang="en-GB" sz="4000" b="1" dirty="0" err="1"/>
-              <a:t>Instruktioner</a:t>
+              <a:t>Anweisungen</a:t>
             </a:r>
             <a:endParaRPr lang="en-GB" sz="4000" b="1" dirty="0"/>
           </a:p>
           <a:p>
-            <a:pPr>
+            <a:pPr marL="514350" indent="-514350">
               <a:lnSpc>
                 <a:spcPct val="110000"/>
               </a:lnSpc>
+              <a:buFont typeface="Arial" panose="020B0604020202020204" pitchFamily="34" charset="0"/>
+              <a:buChar char="•"/>
             </a:pPr>
             <a:r>
-              <a:rPr lang="en-GB" sz="3200" dirty="0"/>
-              <a:t>Vi </a:t>
+              <a:rPr lang="de-DE" sz="3200" dirty="0"/>
+              <a:t>Wir möchten, dass Sie ein Spiel spielen. Im Spiel gibt es START- und STOP-Tests. Hier sind die Spielregeln:</a:t>
             </a:r>
-            <a:r>
-              <a:rPr lang="en-GB" sz="3200" dirty="0" err="1"/>
-              <a:t>vil</a:t>
-            </a:r>
-            <a:r>
-              <a:rPr lang="en-GB" sz="3200" dirty="0"/>
-              <a:t> gerne have, at du spiller et </a:t>
-            </a:r>
-            <a:r>
-              <a:rPr lang="en-GB" sz="3200" dirty="0" err="1"/>
-              <a:t>spil</a:t>
-            </a:r>
-            <a:r>
-              <a:rPr lang="en-GB" sz="3200" dirty="0"/>
-              <a:t>. I </a:t>
-            </a:r>
-            <a:r>
-              <a:rPr lang="en-GB" sz="3200" dirty="0" err="1"/>
-              <a:t>spillet</a:t>
-            </a:r>
-            <a:r>
-              <a:rPr lang="en-GB" sz="3200" dirty="0"/>
-              <a:t> </a:t>
-            </a:r>
-            <a:r>
-              <a:rPr lang="en-GB" sz="3200" dirty="0" err="1"/>
-              <a:t>vil</a:t>
-            </a:r>
-            <a:r>
-              <a:rPr lang="en-GB" sz="3200" dirty="0"/>
-              <a:t> der </a:t>
-            </a:r>
-            <a:r>
-              <a:rPr lang="en-GB" sz="3200" dirty="0" err="1"/>
-              <a:t>være</a:t>
-            </a:r>
-            <a:r>
-              <a:rPr lang="en-GB" sz="3200" dirty="0"/>
-              <a:t> </a:t>
-            </a:r>
-            <a:r>
-              <a:rPr lang="en-GB" sz="3200" b="1" dirty="0"/>
-              <a:t>START- </a:t>
-            </a:r>
-            <a:r>
-              <a:rPr lang="en-GB" sz="3200" b="1" dirty="0" err="1"/>
-              <a:t>og</a:t>
-            </a:r>
-            <a:r>
-              <a:rPr lang="en-GB" sz="3200" b="1" dirty="0"/>
-              <a:t> STOP-</a:t>
-            </a:r>
-            <a:r>
-              <a:rPr lang="en-GB" sz="3200" b="1" dirty="0" err="1"/>
-              <a:t>prøver</a:t>
-            </a:r>
-            <a:r>
-              <a:rPr lang="en-GB" sz="3200" dirty="0"/>
-              <a:t>. </a:t>
-            </a:r>
-            <a:r>
-              <a:rPr lang="en-GB" sz="3200" b="1" dirty="0"/>
-              <a:t>Her er </a:t>
-            </a:r>
-            <a:r>
-              <a:rPr lang="en-GB" sz="3200" b="1" dirty="0" err="1"/>
-              <a:t>reglerne</a:t>
-            </a:r>
-            <a:r>
-              <a:rPr lang="en-GB" sz="3200" b="1" dirty="0"/>
-              <a:t> for </a:t>
-            </a:r>
-            <a:r>
-              <a:rPr lang="en-GB" sz="3200" b="1" dirty="0" err="1"/>
-              <a:t>spillet</a:t>
-            </a:r>
-            <a:r>
-              <a:rPr lang="en-GB" sz="3200" b="1" dirty="0"/>
-              <a:t>: </a:t>
-            </a:r>
+            <a:endParaRPr lang="en-GB" sz="3200" b="1" dirty="0"/>
           </a:p>
           <a:p>
             <a:pPr marL="457200" indent="-457200">
@@ -2303,152 +2275,8 @@
               <a:buChar char="•"/>
             </a:pPr>
             <a:r>
-              <a:rPr lang="en-GB" sz="2700" b="1" dirty="0"/>
-              <a:t>I START-</a:t>
-            </a:r>
-            <a:r>
-              <a:rPr lang="en-GB" sz="2700" b="1" dirty="0" err="1"/>
-              <a:t>prøverne</a:t>
-            </a:r>
-            <a:r>
-              <a:rPr lang="en-GB" sz="2700" b="1" dirty="0"/>
-              <a:t> </a:t>
-            </a:r>
-            <a:r>
-              <a:rPr lang="en-GB" sz="2700" b="1" dirty="0" err="1"/>
-              <a:t>vil</a:t>
-            </a:r>
-            <a:r>
-              <a:rPr lang="en-GB" sz="2700" b="1" dirty="0"/>
-              <a:t> du se </a:t>
-            </a:r>
-            <a:r>
-              <a:rPr lang="en-GB" sz="2700" b="1" dirty="0" err="1"/>
-              <a:t>en</a:t>
-            </a:r>
-            <a:r>
-              <a:rPr lang="en-GB" sz="2700" b="1" dirty="0"/>
-              <a:t> </a:t>
-            </a:r>
-            <a:r>
-              <a:rPr lang="en-GB" sz="2700" b="1" dirty="0" err="1"/>
-              <a:t>pil</a:t>
-            </a:r>
-            <a:r>
-              <a:rPr lang="en-GB" sz="2700" b="1" dirty="0"/>
-              <a:t>, der </a:t>
-            </a:r>
-            <a:r>
-              <a:rPr lang="en-GB" sz="2700" b="1" dirty="0" err="1"/>
-              <a:t>peger</a:t>
-            </a:r>
-            <a:r>
-              <a:rPr lang="en-GB" sz="2700" b="1" dirty="0"/>
-              <a:t> </a:t>
-            </a:r>
-            <a:r>
-              <a:rPr lang="en-GB" sz="2700" b="1" dirty="0" err="1"/>
-              <a:t>til</a:t>
-            </a:r>
-            <a:r>
-              <a:rPr lang="en-GB" sz="2700" b="1" dirty="0"/>
-              <a:t> </a:t>
-            </a:r>
-            <a:r>
-              <a:rPr lang="en-GB" sz="2700" b="1" dirty="0" err="1"/>
-              <a:t>venstre</a:t>
-            </a:r>
-            <a:r>
-              <a:rPr lang="en-GB" sz="2700" b="1" dirty="0"/>
-              <a:t> </a:t>
-            </a:r>
-            <a:r>
-              <a:rPr lang="en-GB" sz="2700" b="1" dirty="0" err="1"/>
-              <a:t>eller</a:t>
-            </a:r>
-            <a:r>
-              <a:rPr lang="en-GB" sz="2700" b="1" dirty="0"/>
-              <a:t> </a:t>
-            </a:r>
-            <a:r>
-              <a:rPr lang="en-GB" sz="2700" b="1" dirty="0" err="1"/>
-              <a:t>højre</a:t>
-            </a:r>
-            <a:r>
-              <a:rPr lang="en-GB" sz="2700" b="1" dirty="0"/>
-              <a:t>. SVAR </a:t>
-            </a:r>
-            <a:r>
-              <a:rPr lang="en-GB" sz="2700" b="1" dirty="0" err="1"/>
-              <a:t>ved</a:t>
-            </a:r>
-            <a:r>
-              <a:rPr lang="en-GB" sz="2700" b="1" dirty="0"/>
-              <a:t> at </a:t>
-            </a:r>
-            <a:r>
-              <a:rPr lang="en-GB" sz="2700" b="1" dirty="0" err="1"/>
-              <a:t>trykke</a:t>
-            </a:r>
-            <a:r>
-              <a:rPr lang="en-GB" sz="2700" b="1" dirty="0"/>
-              <a:t> </a:t>
-            </a:r>
-            <a:r>
-              <a:rPr lang="en-GB" sz="2700" b="1" dirty="0" err="1"/>
-              <a:t>på</a:t>
-            </a:r>
-            <a:r>
-              <a:rPr lang="en-GB" sz="2700" b="1" dirty="0"/>
-              <a:t> </a:t>
-            </a:r>
-            <a:r>
-              <a:rPr lang="en-GB" sz="2700" b="1" dirty="0" err="1"/>
-              <a:t>venstre</a:t>
-            </a:r>
-            <a:r>
-              <a:rPr lang="en-GB" sz="2700" b="1" dirty="0"/>
-              <a:t> </a:t>
-            </a:r>
-            <a:r>
-              <a:rPr lang="en-GB" sz="2700" b="1" dirty="0" err="1"/>
-              <a:t>eller</a:t>
-            </a:r>
-            <a:r>
-              <a:rPr lang="en-GB" sz="2700" b="1" dirty="0"/>
-              <a:t> </a:t>
-            </a:r>
-            <a:r>
-              <a:rPr lang="en-GB" sz="2700" b="1" dirty="0" err="1"/>
-              <a:t>højre</a:t>
-            </a:r>
-            <a:r>
-              <a:rPr lang="en-GB" sz="2700" b="1" dirty="0"/>
-              <a:t> knap </a:t>
-            </a:r>
-            <a:r>
-              <a:rPr lang="en-GB" sz="2700" b="1" dirty="0" err="1"/>
-              <a:t>på</a:t>
-            </a:r>
-            <a:r>
-              <a:rPr lang="en-GB" sz="2700" b="1" dirty="0"/>
-              <a:t> </a:t>
-            </a:r>
-            <a:r>
-              <a:rPr lang="en-GB" sz="2700" b="1" dirty="0" err="1"/>
-              <a:t>dit</a:t>
-            </a:r>
-            <a:r>
-              <a:rPr lang="en-GB" sz="2700" b="1" dirty="0"/>
-              <a:t> </a:t>
-            </a:r>
-            <a:r>
-              <a:rPr lang="en-GB" sz="2700" b="1" dirty="0" err="1"/>
-              <a:t>tastatur</a:t>
-            </a:r>
-            <a:r>
-              <a:rPr lang="en-GB" sz="2700" b="1" dirty="0"/>
-              <a:t>.</a:t>
+              <a:rPr lang="de-DE" sz="2700" b="1" dirty="0"/>
+              <a:t>In den START-Tests sehen Sie einen Pfeil, der nach links oder rechts zeigt. ANTWORTEN Sie, indem Sie die linke oder rechte Taste auf Ihrer Tastatur drücken.</a:t>
             </a:r>
           </a:p>
           <a:p>
@@ -2460,89 +2288,10 @@
               <a:buChar char="•"/>
             </a:pPr>
             <a:r>
-              <a:rPr lang="en-GB" sz="2700" b="1" dirty="0"/>
-              <a:t>I STOP-</a:t>
+              <a:rPr lang="de-DE" sz="2700" b="1" dirty="0"/>
+              <a:t>Bei den STOP-Tests sehen Sie einen Pfeil gefolgt von einem ROTEN KREIS. Bei diesen Tests dürfen Sie NICHT ANTWORTEN!</a:t>
             </a:r>
-            <a:r>
-              <a:rPr lang="en-GB" sz="2700" b="1" dirty="0" err="1"/>
-              <a:t>prøverne</a:t>
-            </a:r>
-            <a:r>
-              <a:rPr lang="en-GB" sz="2700" b="1" dirty="0"/>
-              <a:t> </a:t>
-            </a:r>
-            <a:r>
-              <a:rPr lang="en-GB" sz="2700" b="1" dirty="0" err="1"/>
-              <a:t>vil</a:t>
-            </a:r>
-            <a:r>
-              <a:rPr lang="en-GB" sz="2700" b="1" dirty="0"/>
-              <a:t> du se </a:t>
-            </a:r>
-            <a:r>
-              <a:rPr lang="en-GB" sz="2700" b="1" dirty="0" err="1"/>
-              <a:t>en</a:t>
-            </a:r>
-            <a:r>
-              <a:rPr lang="en-GB" sz="2700" b="1" dirty="0"/>
-              <a:t> </a:t>
-            </a:r>
-            <a:r>
-              <a:rPr lang="en-GB" sz="2700" b="1" dirty="0" err="1"/>
-              <a:t>pil</a:t>
-            </a:r>
-            <a:r>
-              <a:rPr lang="en-GB" sz="2700" b="1" dirty="0"/>
-              <a:t> </a:t>
-            </a:r>
-            <a:r>
-              <a:rPr lang="en-GB" sz="2700" b="1" dirty="0" err="1"/>
-              <a:t>efterfulgt</a:t>
-            </a:r>
-            <a:r>
-              <a:rPr lang="en-GB" sz="2700" b="1" dirty="0"/>
-              <a:t> </a:t>
-            </a:r>
-            <a:r>
-              <a:rPr lang="en-GB" sz="2700" b="1" dirty="0" err="1"/>
-              <a:t>af</a:t>
-            </a:r>
-            <a:r>
-              <a:rPr lang="en-GB" sz="2700" b="1" dirty="0"/>
-              <a:t> </a:t>
-            </a:r>
-            <a:r>
-              <a:rPr lang="en-GB" sz="2700" b="1" dirty="0" err="1"/>
-              <a:t>en</a:t>
-            </a:r>
-            <a:r>
-              <a:rPr lang="en-GB" sz="2700" b="1" dirty="0"/>
-              <a:t> RØD CIRKEL. I </a:t>
-            </a:r>
-            <a:r>
-              <a:rPr lang="en-GB" sz="2700" b="1" dirty="0" err="1"/>
-              <a:t>disse</a:t>
-            </a:r>
-            <a:r>
-              <a:rPr lang="en-GB" sz="2700" b="1" dirty="0"/>
-              <a:t> </a:t>
-            </a:r>
-            <a:r>
-              <a:rPr lang="en-GB" sz="2700" b="1" dirty="0" err="1"/>
-              <a:t>prøver</a:t>
-            </a:r>
-            <a:r>
-              <a:rPr lang="en-GB" sz="2700" b="1" dirty="0"/>
-              <a:t> </a:t>
-            </a:r>
-            <a:r>
-              <a:rPr lang="en-GB" sz="2700" b="1" dirty="0" err="1"/>
-              <a:t>skal</a:t>
-            </a:r>
-            <a:r>
-              <a:rPr lang="en-GB" sz="2700" b="1" dirty="0"/>
-              <a:t> du IKKE SVARE! </a:t>
-            </a:r>
+            <a:endParaRPr lang="en-GB" sz="2700" b="1" dirty="0"/>
           </a:p>
           <a:p>
             <a:pPr marL="457200" indent="-457200">
@@ -2553,44 +2302,12 @@
               <a:buChar char="•"/>
             </a:pPr>
             <a:r>
-              <a:rPr lang="en-GB" sz="2700" b="1" dirty="0" err="1">
+              <a:rPr lang="de-DE" sz="2700" b="1" dirty="0">
                 <a:solidFill>
                   <a:srgbClr val="FFFF00"/>
                 </a:solidFill>
               </a:rPr>
-              <a:t>Formålet</a:t>
-            </a:r>
-            <a:r>
-              <a:rPr lang="en-GB" sz="2700" b="1" dirty="0">
-                <a:solidFill>
-                  <a:srgbClr val="FFFF00"/>
-                </a:solidFill>
-              </a:rPr>
-              <a:t> med </a:t>
-            </a:r>
-            <a:r>
-              <a:rPr lang="en-GB" sz="2700" b="1" dirty="0" err="1">
-                <a:solidFill>
-                  <a:srgbClr val="FFFF00"/>
-                </a:solidFill>
-              </a:rPr>
-              <a:t>spillet</a:t>
-            </a:r>
-            <a:r>
-              <a:rPr lang="en-GB" sz="2700" b="1" dirty="0">
-                <a:solidFill>
-                  <a:srgbClr val="FFFF00"/>
-                </a:solidFill>
-              </a:rPr>
-              <a:t> er at </a:t>
-            </a:r>
-            <a:r>
-              <a:rPr lang="en-GB" sz="2700" b="1" dirty="0" err="1">
-                <a:solidFill>
-                  <a:srgbClr val="FFFF00"/>
-                </a:solidFill>
-              </a:rPr>
-              <a:t>opnå</a:t>
+              <a:t>Ziel des Spiels ist es, so viele Punkte wie möglich zu erzielen.</a:t>
             </a:r>
             <a:r>
               <a:rPr lang="en-GB" sz="2700" b="1" dirty="0">
@@ -2600,54 +2317,6 @@
               </a:rPr>
               <a:t> </a:t>
             </a:r>
-            <a:r>
-              <a:rPr lang="en-GB" sz="2700" b="1" dirty="0" err="1">
-                <a:solidFill>
-                  <a:srgbClr val="FFFF00"/>
-                </a:solidFill>
-              </a:rPr>
-              <a:t>så</a:t>
-            </a:r>
-            <a:r>
-              <a:rPr lang="en-GB" sz="2700" b="1" dirty="0">
-                <a:solidFill>
-                  <a:srgbClr val="FFFF00"/>
-                </a:solidFill>
-              </a:rPr>
-              <a:t> mange point </a:t>
-            </a:r>
-            <a:r>
-              <a:rPr lang="en-GB" sz="2700" b="1" dirty="0" err="1">
-                <a:solidFill>
-                  <a:srgbClr val="FFFF00"/>
-                </a:solidFill>
-              </a:rPr>
-              <a:t>som</a:t>
-            </a:r>
-            <a:r>
-              <a:rPr lang="en-GB" sz="2700" b="1" dirty="0">
-                <a:solidFill>
-                  <a:srgbClr val="FFFF00"/>
-                </a:solidFill>
-              </a:rPr>
-              <a:t> </a:t>
-            </a:r>
-            <a:r>
-              <a:rPr lang="en-GB" sz="2700" b="1" dirty="0" err="1">
-                <a:solidFill>
-                  <a:srgbClr val="FFFF00"/>
-                </a:solidFill>
-              </a:rPr>
-              <a:t>muligt</a:t>
-            </a:r>
-            <a:r>
-              <a:rPr lang="en-GB" sz="2700" b="1" dirty="0">
-                <a:solidFill>
-                  <a:srgbClr val="FFFF00"/>
-                </a:solidFill>
-              </a:rPr>
-              <a:t>. </a:t>
-            </a:r>
           </a:p>
           <a:p>
             <a:pPr marL="457200" indent="-457200">
@@ -2658,172 +2327,12 @@
               <a:buChar char="•"/>
             </a:pPr>
             <a:r>
-              <a:rPr lang="en-GB" sz="2700" dirty="0"/>
-              <a:t>I START-</a:t>
-            </a:r>
-            <a:r>
-              <a:rPr lang="en-GB" sz="2700" dirty="0" err="1"/>
-              <a:t>prøverne</a:t>
+              <a:rPr lang="de-DE" sz="2700" dirty="0"/>
+              <a:t>In den START-Tests erhalten Sie bei richtigen Antworten temporäre Punkte. Je schneller Sie antworten, desto mehr Punkte erhalten Sie.</a:t>
             </a:r>
             <a:r>
               <a:rPr lang="en-GB" sz="2700" dirty="0"/>
               <a:t> </a:t>
-            </a:r>
-            <a:r>
-              <a:rPr lang="en-GB" sz="2700" dirty="0" err="1"/>
-              <a:t>vil</a:t>
-            </a:r>
-            <a:r>
-              <a:rPr lang="en-GB" sz="2700" dirty="0"/>
-              <a:t> du </a:t>
-            </a:r>
-            <a:r>
-              <a:rPr lang="en-GB" sz="2700" b="1" dirty="0" err="1">
-                <a:solidFill>
-                  <a:schemeClr val="accent6"/>
-                </a:solidFill>
-              </a:rPr>
-              <a:t>få</a:t>
-            </a:r>
-            <a:r>
-              <a:rPr lang="en-GB" sz="2700" b="1" dirty="0">
-                <a:solidFill>
-                  <a:schemeClr val="accent6"/>
-                </a:solidFill>
-              </a:rPr>
-              <a:t> </a:t>
-            </a:r>
-            <a:r>
-              <a:rPr lang="en-GB" sz="2700" b="1" dirty="0" err="1">
-                <a:solidFill>
-                  <a:schemeClr val="accent6"/>
-                </a:solidFill>
-              </a:rPr>
-              <a:t>midlertidige</a:t>
-            </a:r>
-            <a:r>
-              <a:rPr lang="en-GB" sz="2700" b="1" dirty="0">
-                <a:solidFill>
-                  <a:schemeClr val="accent6"/>
-                </a:solidFill>
-              </a:rPr>
-              <a:t> point, </a:t>
-            </a:r>
-            <a:r>
-              <a:rPr lang="en-GB" sz="2700" b="1" dirty="0" err="1">
-                <a:solidFill>
-                  <a:schemeClr val="accent6"/>
-                </a:solidFill>
-              </a:rPr>
-              <a:t>hvis</a:t>
-            </a:r>
-            <a:r>
-              <a:rPr lang="en-GB" sz="2700" b="1" dirty="0">
-                <a:solidFill>
-                  <a:schemeClr val="accent6"/>
-                </a:solidFill>
-              </a:rPr>
-              <a:t> du </a:t>
-            </a:r>
-            <a:r>
-              <a:rPr lang="en-GB" sz="2700" b="1" dirty="0" err="1">
-                <a:solidFill>
-                  <a:schemeClr val="accent6"/>
-                </a:solidFill>
-              </a:rPr>
-              <a:t>svarer</a:t>
-            </a:r>
-            <a:r>
-              <a:rPr lang="en-GB" sz="2700" b="1" dirty="0">
-                <a:solidFill>
-                  <a:schemeClr val="accent6"/>
-                </a:solidFill>
-              </a:rPr>
-              <a:t> </a:t>
-            </a:r>
-            <a:r>
-              <a:rPr lang="en-GB" sz="2700" b="1" dirty="0" err="1">
-                <a:solidFill>
-                  <a:schemeClr val="accent6"/>
-                </a:solidFill>
-              </a:rPr>
-              <a:t>korrekt</a:t>
-            </a:r>
-            <a:r>
-              <a:rPr lang="en-GB" sz="2700" b="1" dirty="0">
-                <a:solidFill>
-                  <a:schemeClr val="accent6"/>
-                </a:solidFill>
-              </a:rPr>
-              <a:t>. Jo </a:t>
-            </a:r>
-            <a:r>
-              <a:rPr lang="en-GB" sz="2700" b="1" dirty="0" err="1">
-                <a:solidFill>
-                  <a:schemeClr val="accent6"/>
-                </a:solidFill>
-              </a:rPr>
-              <a:t>hurtigere</a:t>
-            </a:r>
-            <a:r>
-              <a:rPr lang="en-GB" sz="2700" b="1" dirty="0">
-                <a:solidFill>
-                  <a:schemeClr val="accent6"/>
-                </a:solidFill>
-              </a:rPr>
-              <a:t> du </a:t>
-            </a:r>
-            <a:r>
-              <a:rPr lang="en-GB" sz="2700" b="1" dirty="0" err="1">
-                <a:solidFill>
-                  <a:schemeClr val="accent6"/>
-                </a:solidFill>
-              </a:rPr>
-              <a:t>svarer</a:t>
-            </a:r>
-            <a:r>
-              <a:rPr lang="en-GB" sz="2700" b="1" dirty="0">
-                <a:solidFill>
-                  <a:schemeClr val="accent6"/>
-                </a:solidFill>
-              </a:rPr>
-              <a:t>, jo </a:t>
-            </a:r>
-            <a:r>
-              <a:rPr lang="en-GB" sz="2700" b="1" dirty="0" err="1">
-                <a:solidFill>
-                  <a:schemeClr val="accent6"/>
-                </a:solidFill>
-              </a:rPr>
-              <a:t>flere</a:t>
-            </a:r>
-            <a:r>
-              <a:rPr lang="en-GB" sz="2700" b="1" dirty="0">
-                <a:solidFill>
-                  <a:schemeClr val="accent6"/>
-                </a:solidFill>
-              </a:rPr>
-              <a:t> point </a:t>
-            </a:r>
-            <a:r>
-              <a:rPr lang="en-GB" sz="2700" b="1" dirty="0" err="1">
-                <a:solidFill>
-                  <a:schemeClr val="accent6"/>
-                </a:solidFill>
-              </a:rPr>
-              <a:t>får</a:t>
-            </a:r>
-            <a:r>
-              <a:rPr lang="en-GB" sz="2700" b="1" dirty="0">
-                <a:solidFill>
-                  <a:schemeClr val="accent6"/>
-                </a:solidFill>
-              </a:rPr>
-              <a:t> du</a:t>
-            </a:r>
-            <a:r>
-              <a:rPr lang="en-GB" sz="2700" dirty="0"/>
-              <a:t>. </a:t>
             </a:r>
           </a:p>
           <a:p>
@@ -2835,133 +2344,10 @@
               <a:buChar char="•"/>
             </a:pPr>
             <a:r>
-              <a:rPr lang="en-GB" sz="2700" dirty="0"/>
-              <a:t>I STOP-</a:t>
+              <a:rPr lang="de-DE" sz="2700" dirty="0"/>
+              <a:t>Bei den STOP-Tests gewinnen Sie die temporären Punkte aus den START-Tests, wenn Sie NICHT antworten. Wenn Sie jedoch antworten, verlieren Sie die temporären Punkte und erhalten SCHMERZEN.</a:t>
             </a:r>
-            <a:r>
-              <a:rPr lang="en-GB" sz="2700" dirty="0" err="1"/>
-              <a:t>prøverne</a:t>
-            </a:r>
-            <a:r>
-              <a:rPr lang="en-GB" sz="2700" dirty="0"/>
-              <a:t> </a:t>
-            </a:r>
-            <a:r>
-              <a:rPr lang="en-GB" sz="2700" dirty="0">
-                <a:solidFill>
-                  <a:schemeClr val="accent6"/>
-                </a:solidFill>
-              </a:rPr>
-              <a:t>VINDER</a:t>
-            </a:r>
-            <a:r>
-              <a:rPr lang="en-GB" sz="2700" dirty="0"/>
-              <a:t> du de </a:t>
-            </a:r>
-            <a:r>
-              <a:rPr lang="en-GB" sz="2700" dirty="0" err="1"/>
-              <a:t>midlertidige</a:t>
-            </a:r>
-            <a:r>
-              <a:rPr lang="en-GB" sz="2700" dirty="0"/>
-              <a:t> point </a:t>
-            </a:r>
-            <a:r>
-              <a:rPr lang="en-GB" sz="2700" dirty="0" err="1"/>
-              <a:t>fra</a:t>
-            </a:r>
-            <a:r>
-              <a:rPr lang="en-GB" sz="2700" dirty="0"/>
-              <a:t> START-</a:t>
-            </a:r>
-            <a:r>
-              <a:rPr lang="en-GB" sz="2700" dirty="0" err="1"/>
-              <a:t>prøverne</a:t>
-            </a:r>
-            <a:r>
-              <a:rPr lang="en-GB" sz="2700" dirty="0"/>
-              <a:t>, </a:t>
-            </a:r>
-            <a:r>
-              <a:rPr lang="en-GB" sz="2700" dirty="0" err="1"/>
-              <a:t>hvis</a:t>
-            </a:r>
-            <a:r>
-              <a:rPr lang="en-GB" sz="2700" dirty="0"/>
-              <a:t> du </a:t>
-            </a:r>
-            <a:r>
-              <a:rPr lang="en-GB" sz="2700" b="1" dirty="0"/>
-              <a:t>IKKE SVARER</a:t>
-            </a:r>
-            <a:r>
-              <a:rPr lang="en-GB" sz="2700" dirty="0"/>
-              <a:t>. </a:t>
-            </a:r>
-            <a:r>
-              <a:rPr lang="en-GB" sz="2700" b="1" dirty="0" err="1"/>
-              <a:t>Hvis</a:t>
-            </a:r>
-            <a:r>
-              <a:rPr lang="en-GB" sz="2700" b="1" dirty="0"/>
-              <a:t> du SVARER, </a:t>
-            </a:r>
-            <a:r>
-              <a:rPr lang="en-GB" sz="2700" b="1" dirty="0" err="1"/>
-              <a:t>vil</a:t>
-            </a:r>
-            <a:r>
-              <a:rPr lang="en-GB" sz="2700" b="1" dirty="0"/>
-              <a:t> du dog </a:t>
-            </a:r>
-            <a:r>
-              <a:rPr lang="en-GB" sz="2700" b="1" dirty="0">
-                <a:solidFill>
-                  <a:srgbClr val="FF0000"/>
-                </a:solidFill>
-              </a:rPr>
-              <a:t>MISTE</a:t>
-            </a:r>
-            <a:r>
-              <a:rPr lang="en-GB" sz="2700" b="1" dirty="0"/>
-              <a:t> de </a:t>
-            </a:r>
-            <a:r>
-              <a:rPr lang="en-GB" sz="2700" b="1" dirty="0" err="1"/>
-              <a:t>midlertidige</a:t>
-            </a:r>
-            <a:r>
-              <a:rPr lang="en-GB" sz="2700" b="1" dirty="0"/>
-              <a:t> point </a:t>
-            </a:r>
-            <a:r>
-              <a:rPr lang="en-GB" sz="2700" b="1" dirty="0" err="1"/>
-              <a:t>og</a:t>
-            </a:r>
-            <a:r>
-              <a:rPr lang="en-GB" sz="2700" b="1" dirty="0"/>
-              <a:t> </a:t>
-            </a:r>
-            <a:r>
-              <a:rPr lang="en-GB" sz="2700" b="1" dirty="0" err="1"/>
-              <a:t>modtage</a:t>
-            </a:r>
-            <a:r>
-              <a:rPr lang="en-GB" sz="2700" b="1" dirty="0"/>
-              <a:t> </a:t>
-            </a:r>
-            <a:r>
-              <a:rPr lang="en-GB" sz="2700" b="1" dirty="0">
-                <a:solidFill>
-                  <a:srgbClr val="FF0000"/>
-                </a:solidFill>
-              </a:rPr>
-              <a:t>SMERTE</a:t>
-            </a:r>
-            <a:r>
-              <a:rPr lang="en-GB" sz="2700" b="1" dirty="0"/>
-              <a:t>.</a:t>
-            </a:r>
+            <a:endParaRPr lang="en-GB" sz="2700" b="1" dirty="0"/>
           </a:p>
         </p:txBody>
       </p:sp>
@@ -3589,6 +2975,15 @@
 </file>
 
 <file path=customXml/item1.xml><?xml version="1.0" encoding="utf-8"?>
+<?mso-contentType ?>
+<FormTemplates xmlns="http://schemas.microsoft.com/sharepoint/v3/contenttype/forms">
+  <Display>DocumentLibraryForm</Display>
+  <Edit>DocumentLibraryForm</Edit>
+  <New>DocumentLibraryForm</New>
+</FormTemplates>
+</file>
+
+<file path=customXml/item2.xml><?xml version="1.0" encoding="utf-8"?>
 <ct:contentTypeSchema xmlns:ct="http://schemas.microsoft.com/office/2006/metadata/contentType" xmlns:ma="http://schemas.microsoft.com/office/2006/metadata/properties/metaAttributes" ct:_="" ma:_="" ma:contentTypeName="Dokument" ma:contentTypeID="0x0101000111E1D2F28E694FA6F6018BE123CF69" ma:contentTypeVersion="5" ma:contentTypeDescription="Opret et nyt dokument." ma:contentTypeScope="" ma:versionID="0331c788d7058e32d99f25e3c64f0e56">
   <xsd:schema xmlns:xsd="http://www.w3.org/2001/XMLSchema" xmlns:xs="http://www.w3.org/2001/XMLSchema" xmlns:p="http://schemas.microsoft.com/office/2006/metadata/properties" xmlns:ns3="fa548a4a-c958-4850-ad60-93e8f312a721" targetNamespace="http://schemas.microsoft.com/office/2006/metadata/properties" ma:root="true" ma:fieldsID="518732303fd9a96679d4ae96f6574fc2" ns3:_="">
     <xsd:import namespace="fa548a4a-c958-4850-ad60-93e8f312a721"/>
@@ -3738,15 +3133,6 @@
 </ct:contentTypeSchema>
 </file>
 
-<file path=customXml/item2.xml><?xml version="1.0" encoding="utf-8"?>
-<?mso-contentType ?>
-<FormTemplates xmlns="http://schemas.microsoft.com/sharepoint/v3/contenttype/forms">
-  <Display>DocumentLibraryForm</Display>
-  <Edit>DocumentLibraryForm</Edit>
-  <New>DocumentLibraryForm</New>
-</FormTemplates>
-</file>
-
 <file path=customXml/item3.xml><?xml version="1.0" encoding="utf-8"?>
 <p:properties xmlns:p="http://schemas.microsoft.com/office/2006/metadata/properties" xmlns:xsi="http://www.w3.org/2001/XMLSchema-instance" xmlns:pc="http://schemas.microsoft.com/office/infopath/2007/PartnerControls">
   <documentManagement>
@@ -3756,6 +3142,14 @@
 </file>
 
 <file path=customXml/itemProps1.xml><?xml version="1.0" encoding="utf-8"?>
+<ds:datastoreItem xmlns:ds="http://schemas.openxmlformats.org/officeDocument/2006/customXml" ds:itemID="{39526271-9B88-4449-88E5-9521F8B5ECB3}">
+  <ds:schemaRefs>
+    <ds:schemaRef ds:uri="http://schemas.microsoft.com/sharepoint/v3/contenttype/forms"/>
+  </ds:schemaRefs>
+</ds:datastoreItem>
+</file>
+
+<file path=customXml/itemProps2.xml><?xml version="1.0" encoding="utf-8"?>
 <ds:datastoreItem xmlns:ds="http://schemas.openxmlformats.org/officeDocument/2006/customXml" ds:itemID="{58761C6E-00EE-417B-A569-5A811CD20C3B}">
   <ds:schemaRefs>
     <ds:schemaRef ds:uri="http://schemas.microsoft.com/office/2006/metadata/contentType"/>
@@ -3773,25 +3167,17 @@
 </ds:datastoreItem>
 </file>
 
-<file path=customXml/itemProps2.xml><?xml version="1.0" encoding="utf-8"?>
-<ds:datastoreItem xmlns:ds="http://schemas.openxmlformats.org/officeDocument/2006/customXml" ds:itemID="{39526271-9B88-4449-88E5-9521F8B5ECB3}">
-  <ds:schemaRefs>
-    <ds:schemaRef ds:uri="http://schemas.microsoft.com/sharepoint/v3/contenttype/forms"/>
-  </ds:schemaRefs>
-</ds:datastoreItem>
-</file>
-
 <file path=customXml/itemProps3.xml><?xml version="1.0" encoding="utf-8"?>
 <ds:datastoreItem xmlns:ds="http://schemas.openxmlformats.org/officeDocument/2006/customXml" ds:itemID="{310440A7-2C58-43E7-9CDB-A63F91881EF7}">
   <ds:schemaRefs>
+    <ds:schemaRef ds:uri="http://schemas.microsoft.com/office/2006/documentManagement/types"/>
+    <ds:schemaRef ds:uri="http://purl.org/dc/terms/"/>
     <ds:schemaRef ds:uri="http://schemas.microsoft.com/office/infopath/2007/PartnerControls"/>
+    <ds:schemaRef ds:uri="http://purl.org/dc/elements/1.1/"/>
+    <ds:schemaRef ds:uri="http://www.w3.org/XML/1998/namespace"/>
+    <ds:schemaRef ds:uri="http://schemas.openxmlformats.org/package/2006/metadata/core-properties"/>
     <ds:schemaRef ds:uri="fa548a4a-c958-4850-ad60-93e8f312a721"/>
-    <ds:schemaRef ds:uri="http://purl.org/dc/elements/1.1/"/>
     <ds:schemaRef ds:uri="http://schemas.microsoft.com/office/2006/metadata/properties"/>
-    <ds:schemaRef ds:uri="http://purl.org/dc/terms/"/>
-    <ds:schemaRef ds:uri="http://schemas.openxmlformats.org/package/2006/metadata/core-properties"/>
-    <ds:schemaRef ds:uri="http://schemas.microsoft.com/office/2006/documentManagement/types"/>
-    <ds:schemaRef ds:uri="http://www.w3.org/XML/1998/namespace"/>
     <ds:schemaRef ds:uri="http://purl.org/dc/dcmitype/"/>
   </ds:schemaRefs>
 </ds:datastoreItem>
